--- a/scripts/PowerPoint Slide Inventory Script/nrw_initial_proposal_output.pptx
+++ b/scripts/PowerPoint Slide Inventory Script/nrw_initial_proposal_output.pptx
@@ -15734,6 +15734,54 @@
           </a:p>
         </p:txBody>
       </p:sp>
+      <p:sp>
+        <p:nvSpPr>
+          <p:cNvPr id="3" name="Text Placeholder 2"/>
+          <p:cNvSpPr>
+            <a:spLocks noGrp="1"/>
+          </p:cNvSpPr>
+          <p:nvPr>
+            <p:ph type="body" idx="12" sz="quarter"/>
+          </p:nvPr>
+        </p:nvSpPr>
+        <p:spPr/>
+        <p:txBody>
+          <a:bodyPr/>
+          <a:lstStyle/>
+          <a:p>
+            <a:pPr>
+              <a:buChar char="•"/>
+            </a:pPr>
+            <a:r>
+              <a:t>Decoupled engagement layer</a:t>
+            </a:r>
+          </a:p>
+          <a:p>
+            <a:pPr>
+              <a:buChar char="•"/>
+            </a:pPr>
+            <a:r>
+              <a:t>Dynamics as customer domain</a:t>
+            </a:r>
+          </a:p>
+          <a:p>
+            <a:pPr>
+              <a:buChar char="•"/>
+            </a:pPr>
+            <a:r>
+              <a:t>Azure integration layer</a:t>
+            </a:r>
+          </a:p>
+          <a:p>
+            <a:pPr>
+              <a:buChar char="•"/>
+            </a:pPr>
+            <a:r>
+              <a:t>Governed data platform</a:t>
+            </a:r>
+          </a:p>
+        </p:txBody>
+      </p:sp>
     </p:spTree>
   </p:cSld>
   <p:clrMapOvr>
@@ -16052,7 +16100,78 @@
         <p:txBody>
           <a:bodyPr/>
           <a:lstStyle/>
-          <a:p/>
+          <a:p>
+            <a:pPr>
+              <a:buChar char="•"/>
+            </a:pPr>
+            <a:r>
+              <a:t>Context and Purpose</a:t>
+            </a:r>
+          </a:p>
+          <a:p>
+            <a:pPr>
+              <a:buChar char="•"/>
+            </a:pPr>
+            <a:r>
+              <a:t>Understanding NRW</a:t>
+            </a:r>
+          </a:p>
+          <a:p>
+            <a:pPr>
+              <a:buChar char="•"/>
+            </a:pPr>
+            <a:r>
+              <a:t>Proposal Clarifications</a:t>
+            </a:r>
+          </a:p>
+          <a:p>
+            <a:pPr>
+              <a:buChar char="•"/>
+            </a:pPr>
+            <a:r>
+              <a:t>Customer Platform Approach</a:t>
+            </a:r>
+          </a:p>
+          <a:p>
+            <a:pPr>
+              <a:buChar char="•"/>
+            </a:pPr>
+            <a:r>
+              <a:t>Delivery and Governance</a:t>
+            </a:r>
+          </a:p>
+          <a:p>
+            <a:pPr>
+              <a:buChar char="•"/>
+            </a:pPr>
+            <a:r>
+              <a:t>Website Innovation</a:t>
+            </a:r>
+          </a:p>
+          <a:p>
+            <a:pPr>
+              <a:buChar char="•"/>
+            </a:pPr>
+            <a:r>
+              <a:t>Sustainability and Social Value</a:t>
+            </a:r>
+          </a:p>
+          <a:p>
+            <a:pPr>
+              <a:buChar char="•"/>
+            </a:pPr>
+            <a:r>
+              <a:t>Commercial Model</a:t>
+            </a:r>
+          </a:p>
+          <a:p>
+            <a:pPr>
+              <a:buChar char="•"/>
+            </a:pPr>
+            <a:r>
+              <a:t>Next Steps</a:t>
+            </a:r>
+          </a:p>
         </p:txBody>
       </p:sp>
     </p:spTree>
@@ -17262,28 +17381,27 @@
               <a:t>Thank you</a:t>
             </a:r>
           </a:p>
+        </p:txBody>
+      </p:sp>
+      <p:sp>
+        <p:nvSpPr>
+          <p:cNvPr id="3" name="Text Placeholder 2"/>
+          <p:cNvSpPr>
+            <a:spLocks noGrp="1"/>
+          </p:cNvSpPr>
+          <p:nvPr>
+            <p:ph type="body" idx="13" sz="quarter"/>
+          </p:nvPr>
+        </p:nvSpPr>
+        <p:spPr/>
+        <p:txBody>
+          <a:bodyPr/>
+          <a:lstStyle/>
           <a:p>
             <a:r>
               <a:t>Questions and discussion welcome</a:t>
             </a:r>
           </a:p>
-        </p:txBody>
-      </p:sp>
-      <p:sp>
-        <p:nvSpPr>
-          <p:cNvPr id="3" name="Text Placeholder 2"/>
-          <p:cNvSpPr>
-            <a:spLocks noGrp="1"/>
-          </p:cNvSpPr>
-          <p:nvPr>
-            <p:ph type="body" idx="13" sz="quarter"/>
-          </p:nvPr>
-        </p:nvSpPr>
-        <p:spPr/>
-        <p:txBody>
-          <a:bodyPr/>
-          <a:lstStyle/>
-          <a:p/>
         </p:txBody>
       </p:sp>
       <p:sp>
